--- a/assets/pptx/catalog-531.pptx
+++ b/assets/pptx/catalog-531.pptx
@@ -3530,7 +3530,7 @@
                 <a:ea typeface="Ebrima"/>
                 <a:cs typeface="Ebrima"/>
               </a:rPr>
-              <a:t>ድንቅ አምላክ ነህና (4x)</a:t>
+              <a:t>ድንቅ አምላክ ነህና 4x</a:t>
             </a:r>
           </a:p>
         </p:txBody>
@@ -3633,7 +3633,7 @@
                 <a:ea typeface="Ebrima"/>
                 <a:cs typeface="Ebrima"/>
               </a:rPr>
-              <a:t>ይሁንልህ ይሁንልህ (4x)</a:t>
+              <a:t>ይሁንልህ ይሁንልህ 4x</a:t>
             </a:r>
           </a:p>
         </p:txBody>
@@ -3754,7 +3754,7 @@
                 <a:ea typeface="Ebrima"/>
                 <a:cs typeface="Ebrima"/>
               </a:rPr>
-              <a:t>ዘለዓለም ተባረክልኝ ዘለዓለም ተወደስልኝ (2x)</a:t>
+              <a:t>ዘለዓለም ተባረክልኝ ዘለዓለም ተወደስልኝ 2x</a:t>
             </a:r>
           </a:p>
         </p:txBody>
@@ -4359,7 +4359,7 @@
                 <a:ea typeface="Ebrima"/>
                 <a:cs typeface="Ebrima"/>
               </a:rPr>
-              <a:t>ድንቅ አምላክ ነህና (2x)</a:t>
+              <a:t>ድንቅ አምላክ ነህና 2x</a:t>
             </a:r>
           </a:p>
         </p:txBody>
@@ -4480,7 +4480,7 @@
                 <a:ea typeface="Ebrima"/>
                 <a:cs typeface="Ebrima"/>
               </a:rPr>
-              <a:t>ድንቅ አምላክ ነህኮ (2x)</a:t>
+              <a:t>ድንቅ አምላክ ነህኮ 2x</a:t>
             </a:r>
           </a:p>
         </p:txBody>
@@ -4583,7 +4583,7 @@
                 <a:ea typeface="Ebrima"/>
                 <a:cs typeface="Ebrima"/>
               </a:rPr>
-              <a:t>ላመልክህ እወዳለሁ ላመልክህ (2x)</a:t>
+              <a:t>ላመልክህ እወዳለሁ ላመልክህ 2x</a:t>
             </a:r>
           </a:p>
         </p:txBody>
